--- a/slides/Week1_Lakehouse_Foundations.pptx
+++ b/slides/Week1_Lakehouse_Foundations.pptx
@@ -2324,6 +2324,132 @@
         <p:txBody>
           <a:bodyPr/>
           <a:lstStyle/>
+          <a:p>
+            <a:r>
+              <a:rPr lang="en-US" sz="1200" b="1" i="0" kern="1200" dirty="0">
+                <a:solidFill>
+                  <a:schemeClr val="tx1"/>
+                </a:solidFill>
+                <a:effectLst/>
+                <a:latin typeface="+mn-lt"/>
+                <a:ea typeface="+mn-ea"/>
+                <a:cs typeface="+mn-cs"/>
+              </a:rPr>
+              <a:t>Serverless SQL warehouse</a:t>
+            </a:r>
+            <a:r>
+              <a:rPr lang="en-US" sz="1200" b="0" i="0" kern="1200" dirty="0">
+                <a:solidFill>
+                  <a:schemeClr val="tx1"/>
+                </a:solidFill>
+                <a:effectLst/>
+                <a:latin typeface="+mn-lt"/>
+                <a:ea typeface="+mn-ea"/>
+                <a:cs typeface="+mn-cs"/>
+              </a:rPr>
+              <a:t> — Best for SQL analytics, BI, and dashboards; Databricks manages scaling and startup.</a:t>
+            </a:r>
+          </a:p>
+          <a:p>
+            <a:r>
+              <a:rPr lang="en-US" sz="1200" b="1" i="0" kern="1200" dirty="0">
+                <a:solidFill>
+                  <a:schemeClr val="tx1"/>
+                </a:solidFill>
+                <a:effectLst/>
+                <a:latin typeface="+mn-lt"/>
+                <a:ea typeface="+mn-ea"/>
+                <a:cs typeface="+mn-cs"/>
+              </a:rPr>
+              <a:t>Serverless compute</a:t>
+            </a:r>
+            <a:r>
+              <a:rPr lang="en-US" sz="1200" b="0" i="0" kern="1200" dirty="0">
+                <a:solidFill>
+                  <a:schemeClr val="tx1"/>
+                </a:solidFill>
+                <a:effectLst/>
+                <a:latin typeface="+mn-lt"/>
+                <a:ea typeface="+mn-ea"/>
+                <a:cs typeface="+mn-cs"/>
+              </a:rPr>
+              <a:t> — For notebooks, jobs, and pipelines without cluster management; fully managed option when available.</a:t>
+            </a:r>
+          </a:p>
+          <a:p>
+            <a:r>
+              <a:rPr lang="en-US" sz="1200" b="1" i="0" kern="1200" dirty="0">
+                <a:solidFill>
+                  <a:schemeClr val="tx1"/>
+                </a:solidFill>
+                <a:effectLst/>
+                <a:latin typeface="+mn-lt"/>
+                <a:ea typeface="+mn-ea"/>
+                <a:cs typeface="+mn-cs"/>
+              </a:rPr>
+              <a:t>All-purpose cluster</a:t>
+            </a:r>
+            <a:r>
+              <a:rPr lang="en-US" sz="1200" b="0" i="0" kern="1200" dirty="0">
+                <a:solidFill>
+                  <a:schemeClr val="tx1"/>
+                </a:solidFill>
+                <a:effectLst/>
+                <a:latin typeface="+mn-lt"/>
+                <a:ea typeface="+mn-ea"/>
+                <a:cs typeface="+mn-cs"/>
+              </a:rPr>
+              <a:t> — Best for interactive development, exploration, and debugging; can stay running, so usually costs more if used for scheduled workloads.</a:t>
+            </a:r>
+          </a:p>
+          <a:p>
+            <a:r>
+              <a:rPr lang="en-US" sz="1200" b="1" i="0" kern="1200">
+                <a:solidFill>
+                  <a:schemeClr val="tx1"/>
+                </a:solidFill>
+                <a:effectLst/>
+                <a:latin typeface="+mn-lt"/>
+                <a:ea typeface="+mn-ea"/>
+                <a:cs typeface="+mn-cs"/>
+              </a:rPr>
+              <a:t>Job cluster / job compute</a:t>
+            </a:r>
+            <a:r>
+              <a:rPr lang="en-US" sz="1200" b="0" i="0" kern="1200">
+                <a:solidFill>
+                  <a:schemeClr val="tx1"/>
+                </a:solidFill>
+                <a:effectLst/>
+                <a:latin typeface="+mn-lt"/>
+                <a:ea typeface="+mn-ea"/>
+                <a:cs typeface="+mn-cs"/>
+              </a:rPr>
+              <a:t> — Created for a job run and terminated after completion; common exam answer for scheduled ETL and cost-efficient production batch workloads.</a:t>
+            </a:r>
+          </a:p>
+          <a:p>
+            <a:endParaRPr lang="en-US" sz="1200" b="0" i="0" u="none" strike="noStrike" kern="1200" dirty="0">
+              <a:solidFill>
+                <a:schemeClr val="tx1"/>
+              </a:solidFill>
+              <a:effectLst/>
+              <a:latin typeface="+mn-lt"/>
+              <a:ea typeface="+mn-ea"/>
+              <a:cs typeface="+mn-cs"/>
+            </a:endParaRPr>
+          </a:p>
+          <a:p>
+            <a:endParaRPr lang="en-US" sz="1200" b="0" i="0" u="none" strike="noStrike" kern="1200" dirty="0">
+              <a:solidFill>
+                <a:schemeClr val="tx1"/>
+              </a:solidFill>
+              <a:effectLst/>
+              <a:latin typeface="+mn-lt"/>
+              <a:ea typeface="+mn-ea"/>
+              <a:cs typeface="+mn-cs"/>
+            </a:endParaRPr>
+          </a:p>
           <a:p>
             <a:r>
               <a:rPr lang="en-US" sz="1200" b="0" i="0" u="none" strike="noStrike" kern="1200" dirty="0">
@@ -4224,6 +4350,334 @@
   <p:clrMapOvr>
     <a:masterClrMapping/>
   </p:clrMapOvr>
+  <p:timing>
+    <p:tnLst>
+      <p:par>
+        <p:cTn id="1" dur="indefinite" restart="never" nodeType="tmRoot">
+          <p:childTnLst>
+            <p:seq concurrent="1" nextAc="seek">
+              <p:cTn id="2" dur="indefinite" nodeType="mainSeq">
+                <p:childTnLst>
+                  <p:par>
+                    <p:cTn id="3" fill="hold">
+                      <p:stCondLst>
+                        <p:cond delay="indefinite"/>
+                      </p:stCondLst>
+                      <p:childTnLst>
+                        <p:par>
+                          <p:cTn id="4" fill="hold">
+                            <p:stCondLst>
+                              <p:cond delay="0"/>
+                            </p:stCondLst>
+                            <p:childTnLst>
+                              <p:par>
+                                <p:cTn id="5" presetID="1" presetClass="entr" presetSubtype="0" fill="hold" grpId="0" nodeType="clickEffect">
+                                  <p:stCondLst>
+                                    <p:cond delay="0"/>
+                                  </p:stCondLst>
+                                  <p:childTnLst>
+                                    <p:set>
+                                      <p:cBhvr>
+                                        <p:cTn id="6" dur="1" fill="hold">
+                                          <p:stCondLst>
+                                            <p:cond delay="0"/>
+                                          </p:stCondLst>
+                                        </p:cTn>
+                                        <p:tgtEl>
+                                          <p:spTgt spid="13"/>
+                                        </p:tgtEl>
+                                        <p:attrNameLst>
+                                          <p:attrName>style.visibility</p:attrName>
+                                        </p:attrNameLst>
+                                      </p:cBhvr>
+                                      <p:to>
+                                        <p:strVal val="visible"/>
+                                      </p:to>
+                                    </p:set>
+                                  </p:childTnLst>
+                                </p:cTn>
+                              </p:par>
+                              <p:par>
+                                <p:cTn id="7" presetID="1" presetClass="entr" presetSubtype="0" fill="hold" grpId="0" nodeType="withEffect">
+                                  <p:stCondLst>
+                                    <p:cond delay="0"/>
+                                  </p:stCondLst>
+                                  <p:childTnLst>
+                                    <p:set>
+                                      <p:cBhvr>
+                                        <p:cTn id="8" dur="1" fill="hold">
+                                          <p:stCondLst>
+                                            <p:cond delay="0"/>
+                                          </p:stCondLst>
+                                        </p:cTn>
+                                        <p:tgtEl>
+                                          <p:spTgt spid="12"/>
+                                        </p:tgtEl>
+                                        <p:attrNameLst>
+                                          <p:attrName>style.visibility</p:attrName>
+                                        </p:attrNameLst>
+                                      </p:cBhvr>
+                                      <p:to>
+                                        <p:strVal val="visible"/>
+                                      </p:to>
+                                    </p:set>
+                                  </p:childTnLst>
+                                </p:cTn>
+                              </p:par>
+                            </p:childTnLst>
+                          </p:cTn>
+                        </p:par>
+                      </p:childTnLst>
+                    </p:cTn>
+                  </p:par>
+                  <p:par>
+                    <p:cTn id="9" fill="hold">
+                      <p:stCondLst>
+                        <p:cond delay="indefinite"/>
+                      </p:stCondLst>
+                      <p:childTnLst>
+                        <p:par>
+                          <p:cTn id="10" fill="hold">
+                            <p:stCondLst>
+                              <p:cond delay="0"/>
+                            </p:stCondLst>
+                            <p:childTnLst>
+                              <p:par>
+                                <p:cTn id="11" presetID="1" presetClass="entr" presetSubtype="0" fill="hold" grpId="0" nodeType="clickEffect">
+                                  <p:stCondLst>
+                                    <p:cond delay="0"/>
+                                  </p:stCondLst>
+                                  <p:childTnLst>
+                                    <p:set>
+                                      <p:cBhvr>
+                                        <p:cTn id="12" dur="1" fill="hold">
+                                          <p:stCondLst>
+                                            <p:cond delay="0"/>
+                                          </p:stCondLst>
+                                        </p:cTn>
+                                        <p:tgtEl>
+                                          <p:spTgt spid="15"/>
+                                        </p:tgtEl>
+                                        <p:attrNameLst>
+                                          <p:attrName>style.visibility</p:attrName>
+                                        </p:attrNameLst>
+                                      </p:cBhvr>
+                                      <p:to>
+                                        <p:strVal val="visible"/>
+                                      </p:to>
+                                    </p:set>
+                                  </p:childTnLst>
+                                </p:cTn>
+                              </p:par>
+                              <p:par>
+                                <p:cTn id="13" presetID="1" presetClass="entr" presetSubtype="0" fill="hold" grpId="0" nodeType="withEffect">
+                                  <p:stCondLst>
+                                    <p:cond delay="0"/>
+                                  </p:stCondLst>
+                                  <p:childTnLst>
+                                    <p:set>
+                                      <p:cBhvr>
+                                        <p:cTn id="14" dur="1" fill="hold">
+                                          <p:stCondLst>
+                                            <p:cond delay="0"/>
+                                          </p:stCondLst>
+                                        </p:cTn>
+                                        <p:tgtEl>
+                                          <p:spTgt spid="14"/>
+                                        </p:tgtEl>
+                                        <p:attrNameLst>
+                                          <p:attrName>style.visibility</p:attrName>
+                                        </p:attrNameLst>
+                                      </p:cBhvr>
+                                      <p:to>
+                                        <p:strVal val="visible"/>
+                                      </p:to>
+                                    </p:set>
+                                  </p:childTnLst>
+                                </p:cTn>
+                              </p:par>
+                            </p:childTnLst>
+                          </p:cTn>
+                        </p:par>
+                      </p:childTnLst>
+                    </p:cTn>
+                  </p:par>
+                  <p:par>
+                    <p:cTn id="15" fill="hold">
+                      <p:stCondLst>
+                        <p:cond delay="indefinite"/>
+                      </p:stCondLst>
+                      <p:childTnLst>
+                        <p:par>
+                          <p:cTn id="16" fill="hold">
+                            <p:stCondLst>
+                              <p:cond delay="0"/>
+                            </p:stCondLst>
+                            <p:childTnLst>
+                              <p:par>
+                                <p:cTn id="17" presetID="1" presetClass="entr" presetSubtype="0" fill="hold" grpId="0" nodeType="clickEffect">
+                                  <p:stCondLst>
+                                    <p:cond delay="0"/>
+                                  </p:stCondLst>
+                                  <p:childTnLst>
+                                    <p:set>
+                                      <p:cBhvr>
+                                        <p:cTn id="18" dur="1" fill="hold">
+                                          <p:stCondLst>
+                                            <p:cond delay="0"/>
+                                          </p:stCondLst>
+                                        </p:cTn>
+                                        <p:tgtEl>
+                                          <p:spTgt spid="17"/>
+                                        </p:tgtEl>
+                                        <p:attrNameLst>
+                                          <p:attrName>style.visibility</p:attrName>
+                                        </p:attrNameLst>
+                                      </p:cBhvr>
+                                      <p:to>
+                                        <p:strVal val="visible"/>
+                                      </p:to>
+                                    </p:set>
+                                  </p:childTnLst>
+                                </p:cTn>
+                              </p:par>
+                              <p:par>
+                                <p:cTn id="19" presetID="1" presetClass="entr" presetSubtype="0" fill="hold" grpId="0" nodeType="withEffect">
+                                  <p:stCondLst>
+                                    <p:cond delay="0"/>
+                                  </p:stCondLst>
+                                  <p:childTnLst>
+                                    <p:set>
+                                      <p:cBhvr>
+                                        <p:cTn id="20" dur="1" fill="hold">
+                                          <p:stCondLst>
+                                            <p:cond delay="0"/>
+                                          </p:stCondLst>
+                                        </p:cTn>
+                                        <p:tgtEl>
+                                          <p:spTgt spid="16"/>
+                                        </p:tgtEl>
+                                        <p:attrNameLst>
+                                          <p:attrName>style.visibility</p:attrName>
+                                        </p:attrNameLst>
+                                      </p:cBhvr>
+                                      <p:to>
+                                        <p:strVal val="visible"/>
+                                      </p:to>
+                                    </p:set>
+                                  </p:childTnLst>
+                                </p:cTn>
+                              </p:par>
+                            </p:childTnLst>
+                          </p:cTn>
+                        </p:par>
+                      </p:childTnLst>
+                    </p:cTn>
+                  </p:par>
+                  <p:par>
+                    <p:cTn id="21" fill="hold">
+                      <p:stCondLst>
+                        <p:cond delay="indefinite"/>
+                      </p:stCondLst>
+                      <p:childTnLst>
+                        <p:par>
+                          <p:cTn id="22" fill="hold">
+                            <p:stCondLst>
+                              <p:cond delay="0"/>
+                            </p:stCondLst>
+                            <p:childTnLst>
+                              <p:par>
+                                <p:cTn id="23" presetID="1" presetClass="entr" presetSubtype="0" fill="hold" grpId="0" nodeType="clickEffect">
+                                  <p:stCondLst>
+                                    <p:cond delay="0"/>
+                                  </p:stCondLst>
+                                  <p:childTnLst>
+                                    <p:set>
+                                      <p:cBhvr>
+                                        <p:cTn id="24" dur="1" fill="hold">
+                                          <p:stCondLst>
+                                            <p:cond delay="0"/>
+                                          </p:stCondLst>
+                                        </p:cTn>
+                                        <p:tgtEl>
+                                          <p:spTgt spid="19"/>
+                                        </p:tgtEl>
+                                        <p:attrNameLst>
+                                          <p:attrName>style.visibility</p:attrName>
+                                        </p:attrNameLst>
+                                      </p:cBhvr>
+                                      <p:to>
+                                        <p:strVal val="visible"/>
+                                      </p:to>
+                                    </p:set>
+                                  </p:childTnLst>
+                                </p:cTn>
+                              </p:par>
+                              <p:par>
+                                <p:cTn id="25" presetID="1" presetClass="entr" presetSubtype="0" fill="hold" grpId="0" nodeType="withEffect">
+                                  <p:stCondLst>
+                                    <p:cond delay="0"/>
+                                  </p:stCondLst>
+                                  <p:childTnLst>
+                                    <p:set>
+                                      <p:cBhvr>
+                                        <p:cTn id="26" dur="1" fill="hold">
+                                          <p:stCondLst>
+                                            <p:cond delay="0"/>
+                                          </p:stCondLst>
+                                        </p:cTn>
+                                        <p:tgtEl>
+                                          <p:spTgt spid="18"/>
+                                        </p:tgtEl>
+                                        <p:attrNameLst>
+                                          <p:attrName>style.visibility</p:attrName>
+                                        </p:attrNameLst>
+                                      </p:cBhvr>
+                                      <p:to>
+                                        <p:strVal val="visible"/>
+                                      </p:to>
+                                    </p:set>
+                                  </p:childTnLst>
+                                </p:cTn>
+                              </p:par>
+                            </p:childTnLst>
+                          </p:cTn>
+                        </p:par>
+                      </p:childTnLst>
+                    </p:cTn>
+                  </p:par>
+                </p:childTnLst>
+              </p:cTn>
+              <p:prevCondLst>
+                <p:cond evt="onPrev" delay="0">
+                  <p:tgtEl>
+                    <p:sldTgt/>
+                  </p:tgtEl>
+                </p:cond>
+              </p:prevCondLst>
+              <p:nextCondLst>
+                <p:cond evt="onNext" delay="0">
+                  <p:tgtEl>
+                    <p:sldTgt/>
+                  </p:tgtEl>
+                </p:cond>
+              </p:nextCondLst>
+            </p:seq>
+          </p:childTnLst>
+        </p:cTn>
+      </p:par>
+    </p:tnLst>
+    <p:bldLst>
+      <p:bldP spid="12" grpId="0" animBg="1"/>
+      <p:bldP spid="13" grpId="0" animBg="1"/>
+      <p:bldP spid="14" grpId="0" animBg="1"/>
+      <p:bldP spid="15" grpId="0" animBg="1"/>
+      <p:bldP spid="16" grpId="0" animBg="1"/>
+      <p:bldP spid="17" grpId="0" animBg="1"/>
+      <p:bldP spid="18" grpId="0" animBg="1"/>
+      <p:bldP spid="19" grpId="0" animBg="1"/>
+    </p:bldLst>
+  </p:timing>
 </p:sld>
 </file>
 
@@ -5502,6 +5956,334 @@
   <p:clrMapOvr>
     <a:masterClrMapping/>
   </p:clrMapOvr>
+  <p:timing>
+    <p:tnLst>
+      <p:par>
+        <p:cTn id="1" dur="indefinite" restart="never" nodeType="tmRoot">
+          <p:childTnLst>
+            <p:seq concurrent="1" nextAc="seek">
+              <p:cTn id="2" dur="indefinite" nodeType="mainSeq">
+                <p:childTnLst>
+                  <p:par>
+                    <p:cTn id="3" fill="hold">
+                      <p:stCondLst>
+                        <p:cond delay="indefinite"/>
+                      </p:stCondLst>
+                      <p:childTnLst>
+                        <p:par>
+                          <p:cTn id="4" fill="hold">
+                            <p:stCondLst>
+                              <p:cond delay="0"/>
+                            </p:stCondLst>
+                            <p:childTnLst>
+                              <p:par>
+                                <p:cTn id="5" presetID="1" presetClass="entr" presetSubtype="0" fill="hold" grpId="0" nodeType="clickEffect">
+                                  <p:stCondLst>
+                                    <p:cond delay="0"/>
+                                  </p:stCondLst>
+                                  <p:childTnLst>
+                                    <p:set>
+                                      <p:cBhvr>
+                                        <p:cTn id="6" dur="1" fill="hold">
+                                          <p:stCondLst>
+                                            <p:cond delay="0"/>
+                                          </p:stCondLst>
+                                        </p:cTn>
+                                        <p:tgtEl>
+                                          <p:spTgt spid="8"/>
+                                        </p:tgtEl>
+                                        <p:attrNameLst>
+                                          <p:attrName>style.visibility</p:attrName>
+                                        </p:attrNameLst>
+                                      </p:cBhvr>
+                                      <p:to>
+                                        <p:strVal val="visible"/>
+                                      </p:to>
+                                    </p:set>
+                                  </p:childTnLst>
+                                </p:cTn>
+                              </p:par>
+                              <p:par>
+                                <p:cTn id="7" presetID="1" presetClass="entr" presetSubtype="0" fill="hold" grpId="0" nodeType="withEffect">
+                                  <p:stCondLst>
+                                    <p:cond delay="0"/>
+                                  </p:stCondLst>
+                                  <p:childTnLst>
+                                    <p:set>
+                                      <p:cBhvr>
+                                        <p:cTn id="8" dur="1" fill="hold">
+                                          <p:stCondLst>
+                                            <p:cond delay="0"/>
+                                          </p:stCondLst>
+                                        </p:cTn>
+                                        <p:tgtEl>
+                                          <p:spTgt spid="7"/>
+                                        </p:tgtEl>
+                                        <p:attrNameLst>
+                                          <p:attrName>style.visibility</p:attrName>
+                                        </p:attrNameLst>
+                                      </p:cBhvr>
+                                      <p:to>
+                                        <p:strVal val="visible"/>
+                                      </p:to>
+                                    </p:set>
+                                  </p:childTnLst>
+                                </p:cTn>
+                              </p:par>
+                            </p:childTnLst>
+                          </p:cTn>
+                        </p:par>
+                      </p:childTnLst>
+                    </p:cTn>
+                  </p:par>
+                  <p:par>
+                    <p:cTn id="9" fill="hold">
+                      <p:stCondLst>
+                        <p:cond delay="indefinite"/>
+                      </p:stCondLst>
+                      <p:childTnLst>
+                        <p:par>
+                          <p:cTn id="10" fill="hold">
+                            <p:stCondLst>
+                              <p:cond delay="0"/>
+                            </p:stCondLst>
+                            <p:childTnLst>
+                              <p:par>
+                                <p:cTn id="11" presetID="1" presetClass="entr" presetSubtype="0" fill="hold" grpId="0" nodeType="clickEffect">
+                                  <p:stCondLst>
+                                    <p:cond delay="0"/>
+                                  </p:stCondLst>
+                                  <p:childTnLst>
+                                    <p:set>
+                                      <p:cBhvr>
+                                        <p:cTn id="12" dur="1" fill="hold">
+                                          <p:stCondLst>
+                                            <p:cond delay="0"/>
+                                          </p:stCondLst>
+                                        </p:cTn>
+                                        <p:tgtEl>
+                                          <p:spTgt spid="10"/>
+                                        </p:tgtEl>
+                                        <p:attrNameLst>
+                                          <p:attrName>style.visibility</p:attrName>
+                                        </p:attrNameLst>
+                                      </p:cBhvr>
+                                      <p:to>
+                                        <p:strVal val="visible"/>
+                                      </p:to>
+                                    </p:set>
+                                  </p:childTnLst>
+                                </p:cTn>
+                              </p:par>
+                              <p:par>
+                                <p:cTn id="13" presetID="1" presetClass="entr" presetSubtype="0" fill="hold" grpId="0" nodeType="withEffect">
+                                  <p:stCondLst>
+                                    <p:cond delay="0"/>
+                                  </p:stCondLst>
+                                  <p:childTnLst>
+                                    <p:set>
+                                      <p:cBhvr>
+                                        <p:cTn id="14" dur="1" fill="hold">
+                                          <p:stCondLst>
+                                            <p:cond delay="0"/>
+                                          </p:stCondLst>
+                                        </p:cTn>
+                                        <p:tgtEl>
+                                          <p:spTgt spid="9"/>
+                                        </p:tgtEl>
+                                        <p:attrNameLst>
+                                          <p:attrName>style.visibility</p:attrName>
+                                        </p:attrNameLst>
+                                      </p:cBhvr>
+                                      <p:to>
+                                        <p:strVal val="visible"/>
+                                      </p:to>
+                                    </p:set>
+                                  </p:childTnLst>
+                                </p:cTn>
+                              </p:par>
+                            </p:childTnLst>
+                          </p:cTn>
+                        </p:par>
+                      </p:childTnLst>
+                    </p:cTn>
+                  </p:par>
+                  <p:par>
+                    <p:cTn id="15" fill="hold">
+                      <p:stCondLst>
+                        <p:cond delay="indefinite"/>
+                      </p:stCondLst>
+                      <p:childTnLst>
+                        <p:par>
+                          <p:cTn id="16" fill="hold">
+                            <p:stCondLst>
+                              <p:cond delay="0"/>
+                            </p:stCondLst>
+                            <p:childTnLst>
+                              <p:par>
+                                <p:cTn id="17" presetID="1" presetClass="entr" presetSubtype="0" fill="hold" grpId="0" nodeType="clickEffect">
+                                  <p:stCondLst>
+                                    <p:cond delay="0"/>
+                                  </p:stCondLst>
+                                  <p:childTnLst>
+                                    <p:set>
+                                      <p:cBhvr>
+                                        <p:cTn id="18" dur="1" fill="hold">
+                                          <p:stCondLst>
+                                            <p:cond delay="0"/>
+                                          </p:stCondLst>
+                                        </p:cTn>
+                                        <p:tgtEl>
+                                          <p:spTgt spid="12"/>
+                                        </p:tgtEl>
+                                        <p:attrNameLst>
+                                          <p:attrName>style.visibility</p:attrName>
+                                        </p:attrNameLst>
+                                      </p:cBhvr>
+                                      <p:to>
+                                        <p:strVal val="visible"/>
+                                      </p:to>
+                                    </p:set>
+                                  </p:childTnLst>
+                                </p:cTn>
+                              </p:par>
+                              <p:par>
+                                <p:cTn id="19" presetID="1" presetClass="entr" presetSubtype="0" fill="hold" grpId="0" nodeType="withEffect">
+                                  <p:stCondLst>
+                                    <p:cond delay="0"/>
+                                  </p:stCondLst>
+                                  <p:childTnLst>
+                                    <p:set>
+                                      <p:cBhvr>
+                                        <p:cTn id="20" dur="1" fill="hold">
+                                          <p:stCondLst>
+                                            <p:cond delay="0"/>
+                                          </p:stCondLst>
+                                        </p:cTn>
+                                        <p:tgtEl>
+                                          <p:spTgt spid="11"/>
+                                        </p:tgtEl>
+                                        <p:attrNameLst>
+                                          <p:attrName>style.visibility</p:attrName>
+                                        </p:attrNameLst>
+                                      </p:cBhvr>
+                                      <p:to>
+                                        <p:strVal val="visible"/>
+                                      </p:to>
+                                    </p:set>
+                                  </p:childTnLst>
+                                </p:cTn>
+                              </p:par>
+                            </p:childTnLst>
+                          </p:cTn>
+                        </p:par>
+                      </p:childTnLst>
+                    </p:cTn>
+                  </p:par>
+                  <p:par>
+                    <p:cTn id="21" fill="hold">
+                      <p:stCondLst>
+                        <p:cond delay="indefinite"/>
+                      </p:stCondLst>
+                      <p:childTnLst>
+                        <p:par>
+                          <p:cTn id="22" fill="hold">
+                            <p:stCondLst>
+                              <p:cond delay="0"/>
+                            </p:stCondLst>
+                            <p:childTnLst>
+                              <p:par>
+                                <p:cTn id="23" presetID="1" presetClass="entr" presetSubtype="0" fill="hold" grpId="0" nodeType="clickEffect">
+                                  <p:stCondLst>
+                                    <p:cond delay="0"/>
+                                  </p:stCondLst>
+                                  <p:childTnLst>
+                                    <p:set>
+                                      <p:cBhvr>
+                                        <p:cTn id="24" dur="1" fill="hold">
+                                          <p:stCondLst>
+                                            <p:cond delay="0"/>
+                                          </p:stCondLst>
+                                        </p:cTn>
+                                        <p:tgtEl>
+                                          <p:spTgt spid="14"/>
+                                        </p:tgtEl>
+                                        <p:attrNameLst>
+                                          <p:attrName>style.visibility</p:attrName>
+                                        </p:attrNameLst>
+                                      </p:cBhvr>
+                                      <p:to>
+                                        <p:strVal val="visible"/>
+                                      </p:to>
+                                    </p:set>
+                                  </p:childTnLst>
+                                </p:cTn>
+                              </p:par>
+                              <p:par>
+                                <p:cTn id="25" presetID="1" presetClass="entr" presetSubtype="0" fill="hold" grpId="0" nodeType="withEffect">
+                                  <p:stCondLst>
+                                    <p:cond delay="0"/>
+                                  </p:stCondLst>
+                                  <p:childTnLst>
+                                    <p:set>
+                                      <p:cBhvr>
+                                        <p:cTn id="26" dur="1" fill="hold">
+                                          <p:stCondLst>
+                                            <p:cond delay="0"/>
+                                          </p:stCondLst>
+                                        </p:cTn>
+                                        <p:tgtEl>
+                                          <p:spTgt spid="13"/>
+                                        </p:tgtEl>
+                                        <p:attrNameLst>
+                                          <p:attrName>style.visibility</p:attrName>
+                                        </p:attrNameLst>
+                                      </p:cBhvr>
+                                      <p:to>
+                                        <p:strVal val="visible"/>
+                                      </p:to>
+                                    </p:set>
+                                  </p:childTnLst>
+                                </p:cTn>
+                              </p:par>
+                            </p:childTnLst>
+                          </p:cTn>
+                        </p:par>
+                      </p:childTnLst>
+                    </p:cTn>
+                  </p:par>
+                </p:childTnLst>
+              </p:cTn>
+              <p:prevCondLst>
+                <p:cond evt="onPrev" delay="0">
+                  <p:tgtEl>
+                    <p:sldTgt/>
+                  </p:tgtEl>
+                </p:cond>
+              </p:prevCondLst>
+              <p:nextCondLst>
+                <p:cond evt="onNext" delay="0">
+                  <p:tgtEl>
+                    <p:sldTgt/>
+                  </p:tgtEl>
+                </p:cond>
+              </p:nextCondLst>
+            </p:seq>
+          </p:childTnLst>
+        </p:cTn>
+      </p:par>
+    </p:tnLst>
+    <p:bldLst>
+      <p:bldP spid="7" grpId="0" animBg="1"/>
+      <p:bldP spid="8" grpId="0" animBg="1"/>
+      <p:bldP spid="9" grpId="0" animBg="1"/>
+      <p:bldP spid="10" grpId="0" animBg="1"/>
+      <p:bldP spid="11" grpId="0" animBg="1"/>
+      <p:bldP spid="12" grpId="0" animBg="1"/>
+      <p:bldP spid="13" grpId="0" animBg="1"/>
+      <p:bldP spid="14" grpId="0" animBg="1"/>
+    </p:bldLst>
+  </p:timing>
 </p:sld>
 </file>
 
@@ -6344,6 +7126,624 @@
   <p:clrMapOvr>
     <a:masterClrMapping/>
   </p:clrMapOvr>
+  <p:timing>
+    <p:tnLst>
+      <p:par>
+        <p:cTn id="1" dur="indefinite" restart="never" nodeType="tmRoot">
+          <p:childTnLst>
+            <p:seq concurrent="1" nextAc="seek">
+              <p:cTn id="2" dur="indefinite" nodeType="mainSeq">
+                <p:childTnLst>
+                  <p:par>
+                    <p:cTn id="3" fill="hold">
+                      <p:stCondLst>
+                        <p:cond delay="indefinite"/>
+                      </p:stCondLst>
+                      <p:childTnLst>
+                        <p:par>
+                          <p:cTn id="4" fill="hold">
+                            <p:stCondLst>
+                              <p:cond delay="0"/>
+                            </p:stCondLst>
+                            <p:childTnLst>
+                              <p:par>
+                                <p:cTn id="5" presetID="1" presetClass="entr" presetSubtype="0" fill="hold" grpId="0" nodeType="clickEffect">
+                                  <p:stCondLst>
+                                    <p:cond delay="0"/>
+                                  </p:stCondLst>
+                                  <p:childTnLst>
+                                    <p:set>
+                                      <p:cBhvr>
+                                        <p:cTn id="6" dur="1" fill="hold">
+                                          <p:stCondLst>
+                                            <p:cond delay="0"/>
+                                          </p:stCondLst>
+                                        </p:cTn>
+                                        <p:tgtEl>
+                                          <p:spTgt spid="7"/>
+                                        </p:tgtEl>
+                                        <p:attrNameLst>
+                                          <p:attrName>style.visibility</p:attrName>
+                                        </p:attrNameLst>
+                                      </p:cBhvr>
+                                      <p:to>
+                                        <p:strVal val="visible"/>
+                                      </p:to>
+                                    </p:set>
+                                  </p:childTnLst>
+                                </p:cTn>
+                              </p:par>
+                              <p:par>
+                                <p:cTn id="7" presetID="1" presetClass="entr" presetSubtype="0" fill="hold" grpId="0" nodeType="withEffect">
+                                  <p:stCondLst>
+                                    <p:cond delay="0"/>
+                                  </p:stCondLst>
+                                  <p:childTnLst>
+                                    <p:set>
+                                      <p:cBhvr>
+                                        <p:cTn id="8" dur="1" fill="hold">
+                                          <p:stCondLst>
+                                            <p:cond delay="0"/>
+                                          </p:stCondLst>
+                                        </p:cTn>
+                                        <p:tgtEl>
+                                          <p:spTgt spid="8"/>
+                                        </p:tgtEl>
+                                        <p:attrNameLst>
+                                          <p:attrName>style.visibility</p:attrName>
+                                        </p:attrNameLst>
+                                      </p:cBhvr>
+                                      <p:to>
+                                        <p:strVal val="visible"/>
+                                      </p:to>
+                                    </p:set>
+                                  </p:childTnLst>
+                                </p:cTn>
+                              </p:par>
+                              <p:par>
+                                <p:cTn id="9" presetID="1" presetClass="entr" presetSubtype="0" fill="hold" grpId="0" nodeType="withEffect">
+                                  <p:stCondLst>
+                                    <p:cond delay="0"/>
+                                  </p:stCondLst>
+                                  <p:childTnLst>
+                                    <p:set>
+                                      <p:cBhvr>
+                                        <p:cTn id="10" dur="1" fill="hold">
+                                          <p:stCondLst>
+                                            <p:cond delay="0"/>
+                                          </p:stCondLst>
+                                        </p:cTn>
+                                        <p:tgtEl>
+                                          <p:spTgt spid="9"/>
+                                        </p:tgtEl>
+                                        <p:attrNameLst>
+                                          <p:attrName>style.visibility</p:attrName>
+                                        </p:attrNameLst>
+                                      </p:cBhvr>
+                                      <p:to>
+                                        <p:strVal val="visible"/>
+                                      </p:to>
+                                    </p:set>
+                                  </p:childTnLst>
+                                </p:cTn>
+                              </p:par>
+                              <p:par>
+                                <p:cTn id="11" presetID="1" presetClass="entr" presetSubtype="0" fill="hold" grpId="0" nodeType="withEffect">
+                                  <p:stCondLst>
+                                    <p:cond delay="0"/>
+                                  </p:stCondLst>
+                                  <p:childTnLst>
+                                    <p:set>
+                                      <p:cBhvr>
+                                        <p:cTn id="12" dur="1" fill="hold">
+                                          <p:stCondLst>
+                                            <p:cond delay="0"/>
+                                          </p:stCondLst>
+                                        </p:cTn>
+                                        <p:tgtEl>
+                                          <p:spTgt spid="10"/>
+                                        </p:tgtEl>
+                                        <p:attrNameLst>
+                                          <p:attrName>style.visibility</p:attrName>
+                                        </p:attrNameLst>
+                                      </p:cBhvr>
+                                      <p:to>
+                                        <p:strVal val="visible"/>
+                                      </p:to>
+                                    </p:set>
+                                  </p:childTnLst>
+                                </p:cTn>
+                              </p:par>
+                              <p:par>
+                                <p:cTn id="13" presetID="1" presetClass="entr" presetSubtype="0" fill="hold" grpId="0" nodeType="withEffect">
+                                  <p:stCondLst>
+                                    <p:cond delay="0"/>
+                                  </p:stCondLst>
+                                  <p:childTnLst>
+                                    <p:set>
+                                      <p:cBhvr>
+                                        <p:cTn id="14" dur="1" fill="hold">
+                                          <p:stCondLst>
+                                            <p:cond delay="0"/>
+                                          </p:stCondLst>
+                                        </p:cTn>
+                                        <p:tgtEl>
+                                          <p:spTgt spid="11"/>
+                                        </p:tgtEl>
+                                        <p:attrNameLst>
+                                          <p:attrName>style.visibility</p:attrName>
+                                        </p:attrNameLst>
+                                      </p:cBhvr>
+                                      <p:to>
+                                        <p:strVal val="visible"/>
+                                      </p:to>
+                                    </p:set>
+                                  </p:childTnLst>
+                                </p:cTn>
+                              </p:par>
+                              <p:par>
+                                <p:cTn id="15" presetID="1" presetClass="entr" presetSubtype="0" fill="hold" grpId="0" nodeType="withEffect">
+                                  <p:stCondLst>
+                                    <p:cond delay="0"/>
+                                  </p:stCondLst>
+                                  <p:childTnLst>
+                                    <p:set>
+                                      <p:cBhvr>
+                                        <p:cTn id="16" dur="1" fill="hold">
+                                          <p:stCondLst>
+                                            <p:cond delay="0"/>
+                                          </p:stCondLst>
+                                        </p:cTn>
+                                        <p:tgtEl>
+                                          <p:spTgt spid="12"/>
+                                        </p:tgtEl>
+                                        <p:attrNameLst>
+                                          <p:attrName>style.visibility</p:attrName>
+                                        </p:attrNameLst>
+                                      </p:cBhvr>
+                                      <p:to>
+                                        <p:strVal val="visible"/>
+                                      </p:to>
+                                    </p:set>
+                                  </p:childTnLst>
+                                </p:cTn>
+                              </p:par>
+                              <p:par>
+                                <p:cTn id="17" presetID="1" presetClass="entr" presetSubtype="0" fill="hold" grpId="0" nodeType="withEffect">
+                                  <p:stCondLst>
+                                    <p:cond delay="0"/>
+                                  </p:stCondLst>
+                                  <p:childTnLst>
+                                    <p:set>
+                                      <p:cBhvr>
+                                        <p:cTn id="18" dur="1" fill="hold">
+                                          <p:stCondLst>
+                                            <p:cond delay="0"/>
+                                          </p:stCondLst>
+                                        </p:cTn>
+                                        <p:tgtEl>
+                                          <p:spTgt spid="13"/>
+                                        </p:tgtEl>
+                                        <p:attrNameLst>
+                                          <p:attrName>style.visibility</p:attrName>
+                                        </p:attrNameLst>
+                                      </p:cBhvr>
+                                      <p:to>
+                                        <p:strVal val="visible"/>
+                                      </p:to>
+                                    </p:set>
+                                  </p:childTnLst>
+                                </p:cTn>
+                              </p:par>
+                              <p:par>
+                                <p:cTn id="19" presetID="1" presetClass="entr" presetSubtype="0" fill="hold" grpId="0" nodeType="withEffect">
+                                  <p:stCondLst>
+                                    <p:cond delay="0"/>
+                                  </p:stCondLst>
+                                  <p:childTnLst>
+                                    <p:set>
+                                      <p:cBhvr>
+                                        <p:cTn id="20" dur="1" fill="hold">
+                                          <p:stCondLst>
+                                            <p:cond delay="0"/>
+                                          </p:stCondLst>
+                                        </p:cTn>
+                                        <p:tgtEl>
+                                          <p:spTgt spid="14"/>
+                                        </p:tgtEl>
+                                        <p:attrNameLst>
+                                          <p:attrName>style.visibility</p:attrName>
+                                        </p:attrNameLst>
+                                      </p:cBhvr>
+                                      <p:to>
+                                        <p:strVal val="visible"/>
+                                      </p:to>
+                                    </p:set>
+                                  </p:childTnLst>
+                                </p:cTn>
+                              </p:par>
+                            </p:childTnLst>
+                          </p:cTn>
+                        </p:par>
+                      </p:childTnLst>
+                    </p:cTn>
+                  </p:par>
+                  <p:par>
+                    <p:cTn id="21" fill="hold">
+                      <p:stCondLst>
+                        <p:cond delay="indefinite"/>
+                      </p:stCondLst>
+                      <p:childTnLst>
+                        <p:par>
+                          <p:cTn id="22" fill="hold">
+                            <p:stCondLst>
+                              <p:cond delay="0"/>
+                            </p:stCondLst>
+                            <p:childTnLst>
+                              <p:par>
+                                <p:cTn id="23" presetID="1" presetClass="entr" presetSubtype="0" fill="hold" grpId="0" nodeType="clickEffect">
+                                  <p:stCondLst>
+                                    <p:cond delay="0"/>
+                                  </p:stCondLst>
+                                  <p:childTnLst>
+                                    <p:set>
+                                      <p:cBhvr>
+                                        <p:cTn id="24" dur="1" fill="hold">
+                                          <p:stCondLst>
+                                            <p:cond delay="0"/>
+                                          </p:stCondLst>
+                                        </p:cTn>
+                                        <p:tgtEl>
+                                          <p:spTgt spid="15"/>
+                                        </p:tgtEl>
+                                        <p:attrNameLst>
+                                          <p:attrName>style.visibility</p:attrName>
+                                        </p:attrNameLst>
+                                      </p:cBhvr>
+                                      <p:to>
+                                        <p:strVal val="visible"/>
+                                      </p:to>
+                                    </p:set>
+                                  </p:childTnLst>
+                                </p:cTn>
+                              </p:par>
+                              <p:par>
+                                <p:cTn id="25" presetID="1" presetClass="entr" presetSubtype="0" fill="hold" grpId="0" nodeType="withEffect">
+                                  <p:stCondLst>
+                                    <p:cond delay="0"/>
+                                  </p:stCondLst>
+                                  <p:childTnLst>
+                                    <p:set>
+                                      <p:cBhvr>
+                                        <p:cTn id="26" dur="1" fill="hold">
+                                          <p:stCondLst>
+                                            <p:cond delay="0"/>
+                                          </p:stCondLst>
+                                        </p:cTn>
+                                        <p:tgtEl>
+                                          <p:spTgt spid="16"/>
+                                        </p:tgtEl>
+                                        <p:attrNameLst>
+                                          <p:attrName>style.visibility</p:attrName>
+                                        </p:attrNameLst>
+                                      </p:cBhvr>
+                                      <p:to>
+                                        <p:strVal val="visible"/>
+                                      </p:to>
+                                    </p:set>
+                                  </p:childTnLst>
+                                </p:cTn>
+                              </p:par>
+                              <p:par>
+                                <p:cTn id="27" presetID="1" presetClass="entr" presetSubtype="0" fill="hold" grpId="0" nodeType="withEffect">
+                                  <p:stCondLst>
+                                    <p:cond delay="0"/>
+                                  </p:stCondLst>
+                                  <p:childTnLst>
+                                    <p:set>
+                                      <p:cBhvr>
+                                        <p:cTn id="28" dur="1" fill="hold">
+                                          <p:stCondLst>
+                                            <p:cond delay="0"/>
+                                          </p:stCondLst>
+                                        </p:cTn>
+                                        <p:tgtEl>
+                                          <p:spTgt spid="17"/>
+                                        </p:tgtEl>
+                                        <p:attrNameLst>
+                                          <p:attrName>style.visibility</p:attrName>
+                                        </p:attrNameLst>
+                                      </p:cBhvr>
+                                      <p:to>
+                                        <p:strVal val="visible"/>
+                                      </p:to>
+                                    </p:set>
+                                  </p:childTnLst>
+                                </p:cTn>
+                              </p:par>
+                              <p:par>
+                                <p:cTn id="29" presetID="1" presetClass="entr" presetSubtype="0" fill="hold" grpId="0" nodeType="withEffect">
+                                  <p:stCondLst>
+                                    <p:cond delay="0"/>
+                                  </p:stCondLst>
+                                  <p:childTnLst>
+                                    <p:set>
+                                      <p:cBhvr>
+                                        <p:cTn id="30" dur="1" fill="hold">
+                                          <p:stCondLst>
+                                            <p:cond delay="0"/>
+                                          </p:stCondLst>
+                                        </p:cTn>
+                                        <p:tgtEl>
+                                          <p:spTgt spid="18"/>
+                                        </p:tgtEl>
+                                        <p:attrNameLst>
+                                          <p:attrName>style.visibility</p:attrName>
+                                        </p:attrNameLst>
+                                      </p:cBhvr>
+                                      <p:to>
+                                        <p:strVal val="visible"/>
+                                      </p:to>
+                                    </p:set>
+                                  </p:childTnLst>
+                                </p:cTn>
+                              </p:par>
+                              <p:par>
+                                <p:cTn id="31" presetID="1" presetClass="entr" presetSubtype="0" fill="hold" grpId="0" nodeType="withEffect">
+                                  <p:stCondLst>
+                                    <p:cond delay="0"/>
+                                  </p:stCondLst>
+                                  <p:childTnLst>
+                                    <p:set>
+                                      <p:cBhvr>
+                                        <p:cTn id="32" dur="1" fill="hold">
+                                          <p:stCondLst>
+                                            <p:cond delay="0"/>
+                                          </p:stCondLst>
+                                        </p:cTn>
+                                        <p:tgtEl>
+                                          <p:spTgt spid="19"/>
+                                        </p:tgtEl>
+                                        <p:attrNameLst>
+                                          <p:attrName>style.visibility</p:attrName>
+                                        </p:attrNameLst>
+                                      </p:cBhvr>
+                                      <p:to>
+                                        <p:strVal val="visible"/>
+                                      </p:to>
+                                    </p:set>
+                                  </p:childTnLst>
+                                </p:cTn>
+                              </p:par>
+                              <p:par>
+                                <p:cTn id="33" presetID="1" presetClass="entr" presetSubtype="0" fill="hold" grpId="0" nodeType="withEffect">
+                                  <p:stCondLst>
+                                    <p:cond delay="0"/>
+                                  </p:stCondLst>
+                                  <p:childTnLst>
+                                    <p:set>
+                                      <p:cBhvr>
+                                        <p:cTn id="34" dur="1" fill="hold">
+                                          <p:stCondLst>
+                                            <p:cond delay="0"/>
+                                          </p:stCondLst>
+                                        </p:cTn>
+                                        <p:tgtEl>
+                                          <p:spTgt spid="20"/>
+                                        </p:tgtEl>
+                                        <p:attrNameLst>
+                                          <p:attrName>style.visibility</p:attrName>
+                                        </p:attrNameLst>
+                                      </p:cBhvr>
+                                      <p:to>
+                                        <p:strVal val="visible"/>
+                                      </p:to>
+                                    </p:set>
+                                  </p:childTnLst>
+                                </p:cTn>
+                              </p:par>
+                              <p:par>
+                                <p:cTn id="35" presetID="1" presetClass="entr" presetSubtype="0" fill="hold" grpId="0" nodeType="withEffect">
+                                  <p:stCondLst>
+                                    <p:cond delay="0"/>
+                                  </p:stCondLst>
+                                  <p:childTnLst>
+                                    <p:set>
+                                      <p:cBhvr>
+                                        <p:cTn id="36" dur="1" fill="hold">
+                                          <p:stCondLst>
+                                            <p:cond delay="0"/>
+                                          </p:stCondLst>
+                                        </p:cTn>
+                                        <p:tgtEl>
+                                          <p:spTgt spid="21"/>
+                                        </p:tgtEl>
+                                        <p:attrNameLst>
+                                          <p:attrName>style.visibility</p:attrName>
+                                        </p:attrNameLst>
+                                      </p:cBhvr>
+                                      <p:to>
+                                        <p:strVal val="visible"/>
+                                      </p:to>
+                                    </p:set>
+                                  </p:childTnLst>
+                                </p:cTn>
+                              </p:par>
+                              <p:par>
+                                <p:cTn id="37" presetID="1" presetClass="entr" presetSubtype="0" fill="hold" grpId="0" nodeType="withEffect">
+                                  <p:stCondLst>
+                                    <p:cond delay="0"/>
+                                  </p:stCondLst>
+                                  <p:childTnLst>
+                                    <p:set>
+                                      <p:cBhvr>
+                                        <p:cTn id="38" dur="1" fill="hold">
+                                          <p:stCondLst>
+                                            <p:cond delay="0"/>
+                                          </p:stCondLst>
+                                        </p:cTn>
+                                        <p:tgtEl>
+                                          <p:spTgt spid="22"/>
+                                        </p:tgtEl>
+                                        <p:attrNameLst>
+                                          <p:attrName>style.visibility</p:attrName>
+                                        </p:attrNameLst>
+                                      </p:cBhvr>
+                                      <p:to>
+                                        <p:strVal val="visible"/>
+                                      </p:to>
+                                    </p:set>
+                                  </p:childTnLst>
+                                </p:cTn>
+                              </p:par>
+                            </p:childTnLst>
+                          </p:cTn>
+                        </p:par>
+                      </p:childTnLst>
+                    </p:cTn>
+                  </p:par>
+                  <p:par>
+                    <p:cTn id="39" fill="hold">
+                      <p:stCondLst>
+                        <p:cond delay="indefinite"/>
+                      </p:stCondLst>
+                      <p:childTnLst>
+                        <p:par>
+                          <p:cTn id="40" fill="hold">
+                            <p:stCondLst>
+                              <p:cond delay="0"/>
+                            </p:stCondLst>
+                            <p:childTnLst>
+                              <p:par>
+                                <p:cTn id="41" presetID="1" presetClass="entr" presetSubtype="0" fill="hold" grpId="0" nodeType="clickEffect">
+                                  <p:stCondLst>
+                                    <p:cond delay="0"/>
+                                  </p:stCondLst>
+                                  <p:childTnLst>
+                                    <p:set>
+                                      <p:cBhvr>
+                                        <p:cTn id="42" dur="1" fill="hold">
+                                          <p:stCondLst>
+                                            <p:cond delay="0"/>
+                                          </p:stCondLst>
+                                        </p:cTn>
+                                        <p:tgtEl>
+                                          <p:spTgt spid="23"/>
+                                        </p:tgtEl>
+                                        <p:attrNameLst>
+                                          <p:attrName>style.visibility</p:attrName>
+                                        </p:attrNameLst>
+                                      </p:cBhvr>
+                                      <p:to>
+                                        <p:strVal val="visible"/>
+                                      </p:to>
+                                    </p:set>
+                                  </p:childTnLst>
+                                </p:cTn>
+                              </p:par>
+                              <p:par>
+                                <p:cTn id="43" presetID="1" presetClass="entr" presetSubtype="0" fill="hold" grpId="0" nodeType="withEffect">
+                                  <p:stCondLst>
+                                    <p:cond delay="0"/>
+                                  </p:stCondLst>
+                                  <p:childTnLst>
+                                    <p:set>
+                                      <p:cBhvr>
+                                        <p:cTn id="44" dur="1" fill="hold">
+                                          <p:stCondLst>
+                                            <p:cond delay="0"/>
+                                          </p:stCondLst>
+                                        </p:cTn>
+                                        <p:tgtEl>
+                                          <p:spTgt spid="24"/>
+                                        </p:tgtEl>
+                                        <p:attrNameLst>
+                                          <p:attrName>style.visibility</p:attrName>
+                                        </p:attrNameLst>
+                                      </p:cBhvr>
+                                      <p:to>
+                                        <p:strVal val="visible"/>
+                                      </p:to>
+                                    </p:set>
+                                  </p:childTnLst>
+                                </p:cTn>
+                              </p:par>
+                              <p:par>
+                                <p:cTn id="45" presetID="1" presetClass="entr" presetSubtype="0" fill="hold" grpId="0" nodeType="withEffect">
+                                  <p:stCondLst>
+                                    <p:cond delay="0"/>
+                                  </p:stCondLst>
+                                  <p:childTnLst>
+                                    <p:set>
+                                      <p:cBhvr>
+                                        <p:cTn id="46" dur="1" fill="hold">
+                                          <p:stCondLst>
+                                            <p:cond delay="0"/>
+                                          </p:stCondLst>
+                                        </p:cTn>
+                                        <p:tgtEl>
+                                          <p:spTgt spid="25"/>
+                                        </p:tgtEl>
+                                        <p:attrNameLst>
+                                          <p:attrName>style.visibility</p:attrName>
+                                        </p:attrNameLst>
+                                      </p:cBhvr>
+                                      <p:to>
+                                        <p:strVal val="visible"/>
+                                      </p:to>
+                                    </p:set>
+                                  </p:childTnLst>
+                                </p:cTn>
+                              </p:par>
+                            </p:childTnLst>
+                          </p:cTn>
+                        </p:par>
+                      </p:childTnLst>
+                    </p:cTn>
+                  </p:par>
+                </p:childTnLst>
+              </p:cTn>
+              <p:prevCondLst>
+                <p:cond evt="onPrev" delay="0">
+                  <p:tgtEl>
+                    <p:sldTgt/>
+                  </p:tgtEl>
+                </p:cond>
+              </p:prevCondLst>
+              <p:nextCondLst>
+                <p:cond evt="onNext" delay="0">
+                  <p:tgtEl>
+                    <p:sldTgt/>
+                  </p:tgtEl>
+                </p:cond>
+              </p:nextCondLst>
+            </p:seq>
+          </p:childTnLst>
+        </p:cTn>
+      </p:par>
+    </p:tnLst>
+    <p:bldLst>
+      <p:bldP spid="7" grpId="0" animBg="1"/>
+      <p:bldP spid="8" grpId="0" animBg="1"/>
+      <p:bldP spid="9" grpId="0" animBg="1"/>
+      <p:bldP spid="10" grpId="0" animBg="1"/>
+      <p:bldP spid="11" grpId="0" animBg="1"/>
+      <p:bldP spid="12" grpId="0" animBg="1"/>
+      <p:bldP spid="13" grpId="0" animBg="1"/>
+      <p:bldP spid="14" grpId="0" animBg="1"/>
+      <p:bldP spid="15" grpId="0" animBg="1"/>
+      <p:bldP spid="16" grpId="0" animBg="1"/>
+      <p:bldP spid="17" grpId="0" animBg="1"/>
+      <p:bldP spid="18" grpId="0" animBg="1"/>
+      <p:bldP spid="19" grpId="0" animBg="1"/>
+      <p:bldP spid="20" grpId="0" animBg="1"/>
+      <p:bldP spid="21" grpId="0" animBg="1"/>
+      <p:bldP spid="22" grpId="0" animBg="1"/>
+      <p:bldP spid="23" grpId="0" animBg="1"/>
+      <p:bldP spid="24" grpId="0" animBg="1"/>
+      <p:bldP spid="25" grpId="0" animBg="1"/>
+    </p:bldLst>
+  </p:timing>
 </p:sld>
 </file>
 
@@ -7162,6 +8562,362 @@
   <p:clrMapOvr>
     <a:masterClrMapping/>
   </p:clrMapOvr>
+  <p:timing>
+    <p:tnLst>
+      <p:par>
+        <p:cTn id="1" dur="indefinite" restart="never" nodeType="tmRoot">
+          <p:childTnLst>
+            <p:seq concurrent="1" nextAc="seek">
+              <p:cTn id="2" dur="indefinite" nodeType="mainSeq">
+                <p:childTnLst>
+                  <p:par>
+                    <p:cTn id="3" fill="hold">
+                      <p:stCondLst>
+                        <p:cond delay="indefinite"/>
+                      </p:stCondLst>
+                      <p:childTnLst>
+                        <p:par>
+                          <p:cTn id="4" fill="hold">
+                            <p:stCondLst>
+                              <p:cond delay="0"/>
+                            </p:stCondLst>
+                            <p:childTnLst>
+                              <p:par>
+                                <p:cTn id="5" presetID="1" presetClass="entr" presetSubtype="0" fill="hold" grpId="0" nodeType="clickEffect">
+                                  <p:stCondLst>
+                                    <p:cond delay="0"/>
+                                  </p:stCondLst>
+                                  <p:childTnLst>
+                                    <p:set>
+                                      <p:cBhvr>
+                                        <p:cTn id="6" dur="1" fill="hold">
+                                          <p:stCondLst>
+                                            <p:cond delay="0"/>
+                                          </p:stCondLst>
+                                        </p:cTn>
+                                        <p:tgtEl>
+                                          <p:spTgt spid="7"/>
+                                        </p:tgtEl>
+                                        <p:attrNameLst>
+                                          <p:attrName>style.visibility</p:attrName>
+                                        </p:attrNameLst>
+                                      </p:cBhvr>
+                                      <p:to>
+                                        <p:strVal val="visible"/>
+                                      </p:to>
+                                    </p:set>
+                                  </p:childTnLst>
+                                </p:cTn>
+                              </p:par>
+                              <p:par>
+                                <p:cTn id="7" presetID="1" presetClass="entr" presetSubtype="0" fill="hold" grpId="0" nodeType="withEffect">
+                                  <p:stCondLst>
+                                    <p:cond delay="0"/>
+                                  </p:stCondLst>
+                                  <p:childTnLst>
+                                    <p:set>
+                                      <p:cBhvr>
+                                        <p:cTn id="8" dur="1" fill="hold">
+                                          <p:stCondLst>
+                                            <p:cond delay="0"/>
+                                          </p:stCondLst>
+                                        </p:cTn>
+                                        <p:tgtEl>
+                                          <p:spTgt spid="8"/>
+                                        </p:tgtEl>
+                                        <p:attrNameLst>
+                                          <p:attrName>style.visibility</p:attrName>
+                                        </p:attrNameLst>
+                                      </p:cBhvr>
+                                      <p:to>
+                                        <p:strVal val="visible"/>
+                                      </p:to>
+                                    </p:set>
+                                  </p:childTnLst>
+                                </p:cTn>
+                              </p:par>
+                            </p:childTnLst>
+                          </p:cTn>
+                        </p:par>
+                      </p:childTnLst>
+                    </p:cTn>
+                  </p:par>
+                  <p:par>
+                    <p:cTn id="9" fill="hold">
+                      <p:stCondLst>
+                        <p:cond delay="indefinite"/>
+                      </p:stCondLst>
+                      <p:childTnLst>
+                        <p:par>
+                          <p:cTn id="10" fill="hold">
+                            <p:stCondLst>
+                              <p:cond delay="0"/>
+                            </p:stCondLst>
+                            <p:childTnLst>
+                              <p:par>
+                                <p:cTn id="11" presetID="1" presetClass="entr" presetSubtype="0" fill="hold" grpId="0" nodeType="clickEffect">
+                                  <p:stCondLst>
+                                    <p:cond delay="0"/>
+                                  </p:stCondLst>
+                                  <p:childTnLst>
+                                    <p:set>
+                                      <p:cBhvr>
+                                        <p:cTn id="12" dur="1" fill="hold">
+                                          <p:stCondLst>
+                                            <p:cond delay="0"/>
+                                          </p:stCondLst>
+                                        </p:cTn>
+                                        <p:tgtEl>
+                                          <p:spTgt spid="9"/>
+                                        </p:tgtEl>
+                                        <p:attrNameLst>
+                                          <p:attrName>style.visibility</p:attrName>
+                                        </p:attrNameLst>
+                                      </p:cBhvr>
+                                      <p:to>
+                                        <p:strVal val="visible"/>
+                                      </p:to>
+                                    </p:set>
+                                  </p:childTnLst>
+                                </p:cTn>
+                              </p:par>
+                              <p:par>
+                                <p:cTn id="13" presetID="1" presetClass="entr" presetSubtype="0" fill="hold" grpId="0" nodeType="withEffect">
+                                  <p:stCondLst>
+                                    <p:cond delay="0"/>
+                                  </p:stCondLst>
+                                  <p:childTnLst>
+                                    <p:set>
+                                      <p:cBhvr>
+                                        <p:cTn id="14" dur="1" fill="hold">
+                                          <p:stCondLst>
+                                            <p:cond delay="0"/>
+                                          </p:stCondLst>
+                                        </p:cTn>
+                                        <p:tgtEl>
+                                          <p:spTgt spid="10"/>
+                                        </p:tgtEl>
+                                        <p:attrNameLst>
+                                          <p:attrName>style.visibility</p:attrName>
+                                        </p:attrNameLst>
+                                      </p:cBhvr>
+                                      <p:to>
+                                        <p:strVal val="visible"/>
+                                      </p:to>
+                                    </p:set>
+                                  </p:childTnLst>
+                                </p:cTn>
+                              </p:par>
+                            </p:childTnLst>
+                          </p:cTn>
+                        </p:par>
+                      </p:childTnLst>
+                    </p:cTn>
+                  </p:par>
+                  <p:par>
+                    <p:cTn id="15" fill="hold">
+                      <p:stCondLst>
+                        <p:cond delay="indefinite"/>
+                      </p:stCondLst>
+                      <p:childTnLst>
+                        <p:par>
+                          <p:cTn id="16" fill="hold">
+                            <p:stCondLst>
+                              <p:cond delay="0"/>
+                            </p:stCondLst>
+                            <p:childTnLst>
+                              <p:par>
+                                <p:cTn id="17" presetID="1" presetClass="entr" presetSubtype="0" fill="hold" grpId="0" nodeType="clickEffect">
+                                  <p:stCondLst>
+                                    <p:cond delay="0"/>
+                                  </p:stCondLst>
+                                  <p:childTnLst>
+                                    <p:set>
+                                      <p:cBhvr>
+                                        <p:cTn id="18" dur="1" fill="hold">
+                                          <p:stCondLst>
+                                            <p:cond delay="0"/>
+                                          </p:stCondLst>
+                                        </p:cTn>
+                                        <p:tgtEl>
+                                          <p:spTgt spid="11"/>
+                                        </p:tgtEl>
+                                        <p:attrNameLst>
+                                          <p:attrName>style.visibility</p:attrName>
+                                        </p:attrNameLst>
+                                      </p:cBhvr>
+                                      <p:to>
+                                        <p:strVal val="visible"/>
+                                      </p:to>
+                                    </p:set>
+                                  </p:childTnLst>
+                                </p:cTn>
+                              </p:par>
+                              <p:par>
+                                <p:cTn id="19" presetID="1" presetClass="entr" presetSubtype="0" fill="hold" grpId="0" nodeType="withEffect">
+                                  <p:stCondLst>
+                                    <p:cond delay="0"/>
+                                  </p:stCondLst>
+                                  <p:childTnLst>
+                                    <p:set>
+                                      <p:cBhvr>
+                                        <p:cTn id="20" dur="1" fill="hold">
+                                          <p:stCondLst>
+                                            <p:cond delay="0"/>
+                                          </p:stCondLst>
+                                        </p:cTn>
+                                        <p:tgtEl>
+                                          <p:spTgt spid="12"/>
+                                        </p:tgtEl>
+                                        <p:attrNameLst>
+                                          <p:attrName>style.visibility</p:attrName>
+                                        </p:attrNameLst>
+                                      </p:cBhvr>
+                                      <p:to>
+                                        <p:strVal val="visible"/>
+                                      </p:to>
+                                    </p:set>
+                                  </p:childTnLst>
+                                </p:cTn>
+                              </p:par>
+                            </p:childTnLst>
+                          </p:cTn>
+                        </p:par>
+                      </p:childTnLst>
+                    </p:cTn>
+                  </p:par>
+                  <p:par>
+                    <p:cTn id="21" fill="hold">
+                      <p:stCondLst>
+                        <p:cond delay="indefinite"/>
+                      </p:stCondLst>
+                      <p:childTnLst>
+                        <p:par>
+                          <p:cTn id="22" fill="hold">
+                            <p:stCondLst>
+                              <p:cond delay="0"/>
+                            </p:stCondLst>
+                            <p:childTnLst>
+                              <p:par>
+                                <p:cTn id="23" presetID="1" presetClass="entr" presetSubtype="0" fill="hold" grpId="0" nodeType="clickEffect">
+                                  <p:stCondLst>
+                                    <p:cond delay="0"/>
+                                  </p:stCondLst>
+                                  <p:childTnLst>
+                                    <p:set>
+                                      <p:cBhvr>
+                                        <p:cTn id="24" dur="1" fill="hold">
+                                          <p:stCondLst>
+                                            <p:cond delay="0"/>
+                                          </p:stCondLst>
+                                        </p:cTn>
+                                        <p:tgtEl>
+                                          <p:spTgt spid="18"/>
+                                        </p:tgtEl>
+                                        <p:attrNameLst>
+                                          <p:attrName>style.visibility</p:attrName>
+                                        </p:attrNameLst>
+                                      </p:cBhvr>
+                                      <p:to>
+                                        <p:strVal val="visible"/>
+                                      </p:to>
+                                    </p:set>
+                                  </p:childTnLst>
+                                </p:cTn>
+                              </p:par>
+                              <p:par>
+                                <p:cTn id="25" presetID="1" presetClass="entr" presetSubtype="0" fill="hold" grpId="0" nodeType="withEffect">
+                                  <p:stCondLst>
+                                    <p:cond delay="0"/>
+                                  </p:stCondLst>
+                                  <p:childTnLst>
+                                    <p:set>
+                                      <p:cBhvr>
+                                        <p:cTn id="26" dur="1" fill="hold">
+                                          <p:stCondLst>
+                                            <p:cond delay="0"/>
+                                          </p:stCondLst>
+                                        </p:cTn>
+                                        <p:tgtEl>
+                                          <p:spTgt spid="19"/>
+                                        </p:tgtEl>
+                                        <p:attrNameLst>
+                                          <p:attrName>style.visibility</p:attrName>
+                                        </p:attrNameLst>
+                                      </p:cBhvr>
+                                      <p:to>
+                                        <p:strVal val="visible"/>
+                                      </p:to>
+                                    </p:set>
+                                  </p:childTnLst>
+                                </p:cTn>
+                              </p:par>
+                              <p:par>
+                                <p:cTn id="27" presetID="1" presetClass="entr" presetSubtype="0" fill="hold" grpId="0" nodeType="withEffect">
+                                  <p:stCondLst>
+                                    <p:cond delay="0"/>
+                                  </p:stCondLst>
+                                  <p:childTnLst>
+                                    <p:set>
+                                      <p:cBhvr>
+                                        <p:cTn id="28" dur="1" fill="hold">
+                                          <p:stCondLst>
+                                            <p:cond delay="0"/>
+                                          </p:stCondLst>
+                                        </p:cTn>
+                                        <p:tgtEl>
+                                          <p:spTgt spid="20"/>
+                                        </p:tgtEl>
+                                        <p:attrNameLst>
+                                          <p:attrName>style.visibility</p:attrName>
+                                        </p:attrNameLst>
+                                      </p:cBhvr>
+                                      <p:to>
+                                        <p:strVal val="visible"/>
+                                      </p:to>
+                                    </p:set>
+                                  </p:childTnLst>
+                                </p:cTn>
+                              </p:par>
+                            </p:childTnLst>
+                          </p:cTn>
+                        </p:par>
+                      </p:childTnLst>
+                    </p:cTn>
+                  </p:par>
+                </p:childTnLst>
+              </p:cTn>
+              <p:prevCondLst>
+                <p:cond evt="onPrev" delay="0">
+                  <p:tgtEl>
+                    <p:sldTgt/>
+                  </p:tgtEl>
+                </p:cond>
+              </p:prevCondLst>
+              <p:nextCondLst>
+                <p:cond evt="onNext" delay="0">
+                  <p:tgtEl>
+                    <p:sldTgt/>
+                  </p:tgtEl>
+                </p:cond>
+              </p:nextCondLst>
+            </p:seq>
+          </p:childTnLst>
+        </p:cTn>
+      </p:par>
+    </p:tnLst>
+    <p:bldLst>
+      <p:bldP spid="7" grpId="0" animBg="1"/>
+      <p:bldP spid="8" grpId="0" animBg="1"/>
+      <p:bldP spid="9" grpId="0" animBg="1"/>
+      <p:bldP spid="10" grpId="0" animBg="1"/>
+      <p:bldP spid="11" grpId="0" animBg="1"/>
+      <p:bldP spid="12" grpId="0" animBg="1"/>
+      <p:bldP spid="18" grpId="0" animBg="1"/>
+      <p:bldP spid="19" grpId="0" animBg="1"/>
+      <p:bldP spid="20" grpId="0" animBg="1"/>
+    </p:bldLst>
+  </p:timing>
 </p:sld>
 </file>
 
@@ -20392,11 +22148,10 @@
           <a:bodyPr wrap="square" lIns="0" tIns="0" rIns="0" bIns="0" rtlCol="0" anchor="ctr"/>
           <a:lstStyle/>
           <a:p>
-            <a:pPr marL="0" indent="0">
+            <a:pPr>
               <a:lnSpc>
                 <a:spcPts val="1400"/>
               </a:lnSpc>
-              <a:buNone/>
             </a:pPr>
             <a:r>
               <a:rPr lang="en-US" sz="1250" b="1" dirty="0">
@@ -20407,7 +22162,7 @@
                 <a:ea typeface="Arial" pitchFamily="34" charset="-122"/>
                 <a:cs typeface="Arial" pitchFamily="34" charset="-120"/>
               </a:rPr>
-              <a:t>Serverless notebook / job compute</a:t>
+              <a:t>Serverless compute (notebook / job)</a:t>
             </a:r>
             <a:endParaRPr lang="en-US" sz="1250" dirty="0"/>
           </a:p>
@@ -22759,6 +24514,334 @@
   <p:clrMapOvr>
     <a:masterClrMapping/>
   </p:clrMapOvr>
+  <p:timing>
+    <p:tnLst>
+      <p:par>
+        <p:cTn id="1" dur="indefinite" restart="never" nodeType="tmRoot">
+          <p:childTnLst>
+            <p:seq concurrent="1" nextAc="seek">
+              <p:cTn id="2" dur="indefinite" nodeType="mainSeq">
+                <p:childTnLst>
+                  <p:par>
+                    <p:cTn id="3" fill="hold">
+                      <p:stCondLst>
+                        <p:cond delay="indefinite"/>
+                      </p:stCondLst>
+                      <p:childTnLst>
+                        <p:par>
+                          <p:cTn id="4" fill="hold">
+                            <p:stCondLst>
+                              <p:cond delay="0"/>
+                            </p:stCondLst>
+                            <p:childTnLst>
+                              <p:par>
+                                <p:cTn id="5" presetID="1" presetClass="entr" presetSubtype="0" fill="hold" grpId="0" nodeType="clickEffect">
+                                  <p:stCondLst>
+                                    <p:cond delay="0"/>
+                                  </p:stCondLst>
+                                  <p:childTnLst>
+                                    <p:set>
+                                      <p:cBhvr>
+                                        <p:cTn id="6" dur="1" fill="hold">
+                                          <p:stCondLst>
+                                            <p:cond delay="0"/>
+                                          </p:stCondLst>
+                                        </p:cTn>
+                                        <p:tgtEl>
+                                          <p:spTgt spid="7"/>
+                                        </p:tgtEl>
+                                        <p:attrNameLst>
+                                          <p:attrName>style.visibility</p:attrName>
+                                        </p:attrNameLst>
+                                      </p:cBhvr>
+                                      <p:to>
+                                        <p:strVal val="visible"/>
+                                      </p:to>
+                                    </p:set>
+                                  </p:childTnLst>
+                                </p:cTn>
+                              </p:par>
+                              <p:par>
+                                <p:cTn id="7" presetID="1" presetClass="entr" presetSubtype="0" fill="hold" grpId="0" nodeType="withEffect">
+                                  <p:stCondLst>
+                                    <p:cond delay="0"/>
+                                  </p:stCondLst>
+                                  <p:childTnLst>
+                                    <p:set>
+                                      <p:cBhvr>
+                                        <p:cTn id="8" dur="1" fill="hold">
+                                          <p:stCondLst>
+                                            <p:cond delay="0"/>
+                                          </p:stCondLst>
+                                        </p:cTn>
+                                        <p:tgtEl>
+                                          <p:spTgt spid="8"/>
+                                        </p:tgtEl>
+                                        <p:attrNameLst>
+                                          <p:attrName>style.visibility</p:attrName>
+                                        </p:attrNameLst>
+                                      </p:cBhvr>
+                                      <p:to>
+                                        <p:strVal val="visible"/>
+                                      </p:to>
+                                    </p:set>
+                                  </p:childTnLst>
+                                </p:cTn>
+                              </p:par>
+                            </p:childTnLst>
+                          </p:cTn>
+                        </p:par>
+                      </p:childTnLst>
+                    </p:cTn>
+                  </p:par>
+                  <p:par>
+                    <p:cTn id="9" fill="hold">
+                      <p:stCondLst>
+                        <p:cond delay="indefinite"/>
+                      </p:stCondLst>
+                      <p:childTnLst>
+                        <p:par>
+                          <p:cTn id="10" fill="hold">
+                            <p:stCondLst>
+                              <p:cond delay="0"/>
+                            </p:stCondLst>
+                            <p:childTnLst>
+                              <p:par>
+                                <p:cTn id="11" presetID="1" presetClass="entr" presetSubtype="0" fill="hold" grpId="0" nodeType="clickEffect">
+                                  <p:stCondLst>
+                                    <p:cond delay="0"/>
+                                  </p:stCondLst>
+                                  <p:childTnLst>
+                                    <p:set>
+                                      <p:cBhvr>
+                                        <p:cTn id="12" dur="1" fill="hold">
+                                          <p:stCondLst>
+                                            <p:cond delay="0"/>
+                                          </p:stCondLst>
+                                        </p:cTn>
+                                        <p:tgtEl>
+                                          <p:spTgt spid="10"/>
+                                        </p:tgtEl>
+                                        <p:attrNameLst>
+                                          <p:attrName>style.visibility</p:attrName>
+                                        </p:attrNameLst>
+                                      </p:cBhvr>
+                                      <p:to>
+                                        <p:strVal val="visible"/>
+                                      </p:to>
+                                    </p:set>
+                                  </p:childTnLst>
+                                </p:cTn>
+                              </p:par>
+                              <p:par>
+                                <p:cTn id="13" presetID="1" presetClass="entr" presetSubtype="0" fill="hold" grpId="0" nodeType="withEffect">
+                                  <p:stCondLst>
+                                    <p:cond delay="0"/>
+                                  </p:stCondLst>
+                                  <p:childTnLst>
+                                    <p:set>
+                                      <p:cBhvr>
+                                        <p:cTn id="14" dur="1" fill="hold">
+                                          <p:stCondLst>
+                                            <p:cond delay="0"/>
+                                          </p:stCondLst>
+                                        </p:cTn>
+                                        <p:tgtEl>
+                                          <p:spTgt spid="9"/>
+                                        </p:tgtEl>
+                                        <p:attrNameLst>
+                                          <p:attrName>style.visibility</p:attrName>
+                                        </p:attrNameLst>
+                                      </p:cBhvr>
+                                      <p:to>
+                                        <p:strVal val="visible"/>
+                                      </p:to>
+                                    </p:set>
+                                  </p:childTnLst>
+                                </p:cTn>
+                              </p:par>
+                            </p:childTnLst>
+                          </p:cTn>
+                        </p:par>
+                      </p:childTnLst>
+                    </p:cTn>
+                  </p:par>
+                  <p:par>
+                    <p:cTn id="15" fill="hold">
+                      <p:stCondLst>
+                        <p:cond delay="indefinite"/>
+                      </p:stCondLst>
+                      <p:childTnLst>
+                        <p:par>
+                          <p:cTn id="16" fill="hold">
+                            <p:stCondLst>
+                              <p:cond delay="0"/>
+                            </p:stCondLst>
+                            <p:childTnLst>
+                              <p:par>
+                                <p:cTn id="17" presetID="1" presetClass="entr" presetSubtype="0" fill="hold" grpId="0" nodeType="clickEffect">
+                                  <p:stCondLst>
+                                    <p:cond delay="0"/>
+                                  </p:stCondLst>
+                                  <p:childTnLst>
+                                    <p:set>
+                                      <p:cBhvr>
+                                        <p:cTn id="18" dur="1" fill="hold">
+                                          <p:stCondLst>
+                                            <p:cond delay="0"/>
+                                          </p:stCondLst>
+                                        </p:cTn>
+                                        <p:tgtEl>
+                                          <p:spTgt spid="12"/>
+                                        </p:tgtEl>
+                                        <p:attrNameLst>
+                                          <p:attrName>style.visibility</p:attrName>
+                                        </p:attrNameLst>
+                                      </p:cBhvr>
+                                      <p:to>
+                                        <p:strVal val="visible"/>
+                                      </p:to>
+                                    </p:set>
+                                  </p:childTnLst>
+                                </p:cTn>
+                              </p:par>
+                              <p:par>
+                                <p:cTn id="19" presetID="1" presetClass="entr" presetSubtype="0" fill="hold" grpId="0" nodeType="withEffect">
+                                  <p:stCondLst>
+                                    <p:cond delay="0"/>
+                                  </p:stCondLst>
+                                  <p:childTnLst>
+                                    <p:set>
+                                      <p:cBhvr>
+                                        <p:cTn id="20" dur="1" fill="hold">
+                                          <p:stCondLst>
+                                            <p:cond delay="0"/>
+                                          </p:stCondLst>
+                                        </p:cTn>
+                                        <p:tgtEl>
+                                          <p:spTgt spid="11"/>
+                                        </p:tgtEl>
+                                        <p:attrNameLst>
+                                          <p:attrName>style.visibility</p:attrName>
+                                        </p:attrNameLst>
+                                      </p:cBhvr>
+                                      <p:to>
+                                        <p:strVal val="visible"/>
+                                      </p:to>
+                                    </p:set>
+                                  </p:childTnLst>
+                                </p:cTn>
+                              </p:par>
+                            </p:childTnLst>
+                          </p:cTn>
+                        </p:par>
+                      </p:childTnLst>
+                    </p:cTn>
+                  </p:par>
+                  <p:par>
+                    <p:cTn id="21" fill="hold">
+                      <p:stCondLst>
+                        <p:cond delay="indefinite"/>
+                      </p:stCondLst>
+                      <p:childTnLst>
+                        <p:par>
+                          <p:cTn id="22" fill="hold">
+                            <p:stCondLst>
+                              <p:cond delay="0"/>
+                            </p:stCondLst>
+                            <p:childTnLst>
+                              <p:par>
+                                <p:cTn id="23" presetID="1" presetClass="entr" presetSubtype="0" fill="hold" grpId="0" nodeType="clickEffect">
+                                  <p:stCondLst>
+                                    <p:cond delay="0"/>
+                                  </p:stCondLst>
+                                  <p:childTnLst>
+                                    <p:set>
+                                      <p:cBhvr>
+                                        <p:cTn id="24" dur="1" fill="hold">
+                                          <p:stCondLst>
+                                            <p:cond delay="0"/>
+                                          </p:stCondLst>
+                                        </p:cTn>
+                                        <p:tgtEl>
+                                          <p:spTgt spid="14"/>
+                                        </p:tgtEl>
+                                        <p:attrNameLst>
+                                          <p:attrName>style.visibility</p:attrName>
+                                        </p:attrNameLst>
+                                      </p:cBhvr>
+                                      <p:to>
+                                        <p:strVal val="visible"/>
+                                      </p:to>
+                                    </p:set>
+                                  </p:childTnLst>
+                                </p:cTn>
+                              </p:par>
+                              <p:par>
+                                <p:cTn id="25" presetID="1" presetClass="entr" presetSubtype="0" fill="hold" grpId="0" nodeType="withEffect">
+                                  <p:stCondLst>
+                                    <p:cond delay="0"/>
+                                  </p:stCondLst>
+                                  <p:childTnLst>
+                                    <p:set>
+                                      <p:cBhvr>
+                                        <p:cTn id="26" dur="1" fill="hold">
+                                          <p:stCondLst>
+                                            <p:cond delay="0"/>
+                                          </p:stCondLst>
+                                        </p:cTn>
+                                        <p:tgtEl>
+                                          <p:spTgt spid="13"/>
+                                        </p:tgtEl>
+                                        <p:attrNameLst>
+                                          <p:attrName>style.visibility</p:attrName>
+                                        </p:attrNameLst>
+                                      </p:cBhvr>
+                                      <p:to>
+                                        <p:strVal val="visible"/>
+                                      </p:to>
+                                    </p:set>
+                                  </p:childTnLst>
+                                </p:cTn>
+                              </p:par>
+                            </p:childTnLst>
+                          </p:cTn>
+                        </p:par>
+                      </p:childTnLst>
+                    </p:cTn>
+                  </p:par>
+                </p:childTnLst>
+              </p:cTn>
+              <p:prevCondLst>
+                <p:cond evt="onPrev" delay="0">
+                  <p:tgtEl>
+                    <p:sldTgt/>
+                  </p:tgtEl>
+                </p:cond>
+              </p:prevCondLst>
+              <p:nextCondLst>
+                <p:cond evt="onNext" delay="0">
+                  <p:tgtEl>
+                    <p:sldTgt/>
+                  </p:tgtEl>
+                </p:cond>
+              </p:nextCondLst>
+            </p:seq>
+          </p:childTnLst>
+        </p:cTn>
+      </p:par>
+    </p:tnLst>
+    <p:bldLst>
+      <p:bldP spid="7" grpId="0" animBg="1"/>
+      <p:bldP spid="8" grpId="0" animBg="1"/>
+      <p:bldP spid="9" grpId="0" animBg="1"/>
+      <p:bldP spid="10" grpId="0" animBg="1"/>
+      <p:bldP spid="11" grpId="0" animBg="1"/>
+      <p:bldP spid="12" grpId="0" animBg="1"/>
+      <p:bldP spid="13" grpId="0" animBg="1"/>
+      <p:bldP spid="14" grpId="0" animBg="1"/>
+    </p:bldLst>
+  </p:timing>
 </p:sld>
 </file>
 
